--- a/docs/pptx/carbo/ritu-carbo-linsubhr-egfrdisc-akikdigo.pptx
+++ b/docs/pptx/carbo/ritu-carbo-linsubhr-egfrdisc-akikdigo.pptx
@@ -2443,7 +2443,7 @@
           </p:nvSpPr>
           <p:spPr>
             <a:xfrm>
-              <a:off x="1810493" y="2073503"/>
+              <a:off x="1813815" y="2073503"/>
               <a:ext cx="0" cy="3649639"/>
             </a:xfrm>
             <a:custGeom>
@@ -2486,7 +2486,7 @@
           </p:nvSpPr>
           <p:spPr>
             <a:xfrm>
-              <a:off x="4291851" y="2073503"/>
+              <a:off x="4291714" y="2073503"/>
               <a:ext cx="0" cy="3649639"/>
             </a:xfrm>
             <a:custGeom>
@@ -2529,7 +2529,7 @@
           </p:nvSpPr>
           <p:spPr>
             <a:xfrm>
-              <a:off x="6773208" y="2073503"/>
+              <a:off x="6769614" y="2073503"/>
               <a:ext cx="0" cy="3649639"/>
             </a:xfrm>
             <a:custGeom>
@@ -2787,7 +2787,7 @@
           </p:nvSpPr>
           <p:spPr>
             <a:xfrm>
-              <a:off x="3051172" y="2073503"/>
+              <a:off x="3052764" y="2073503"/>
               <a:ext cx="0" cy="3649639"/>
             </a:xfrm>
             <a:custGeom>
@@ -2830,7 +2830,7 @@
           </p:nvSpPr>
           <p:spPr>
             <a:xfrm>
-              <a:off x="5532530" y="2073503"/>
+              <a:off x="5530664" y="2073503"/>
               <a:ext cx="0" cy="3649639"/>
             </a:xfrm>
             <a:custGeom>
@@ -2873,7 +2873,7 @@
           </p:nvSpPr>
           <p:spPr>
             <a:xfrm>
-              <a:off x="8013887" y="2073503"/>
+              <a:off x="8008563" y="2073503"/>
               <a:ext cx="0" cy="3649639"/>
             </a:xfrm>
             <a:custGeom>
@@ -2917,473 +2917,473 @@
           <p:spPr>
             <a:xfrm>
               <a:off x="1172049" y="2073503"/>
-              <a:ext cx="7090630" cy="3454228"/>
+              <a:ext cx="7090630" cy="3453624"/>
             </a:xfrm>
             <a:custGeom>
               <a:avLst/>
               <a:pathLst>
-                <a:path w="7090630" h="3454228">
+                <a:path w="7090630" h="3453624">
                   <a:moveTo>
-                    <a:pt x="3335910" y="0"/>
+                    <a:pt x="3356651" y="0"/>
                   </a:moveTo>
                   <a:lnTo>
-                    <a:pt x="3366258" y="135153"/>
-                  </a:lnTo>
-                  <a:lnTo>
-                    <a:pt x="3437881" y="426379"/>
-                  </a:lnTo>
-                  <a:lnTo>
-                    <a:pt x="3509503" y="692277"/>
-                  </a:lnTo>
-                  <a:lnTo>
-                    <a:pt x="3581126" y="935050"/>
-                  </a:lnTo>
-                  <a:lnTo>
-                    <a:pt x="3652748" y="1156709"/>
-                  </a:lnTo>
-                  <a:lnTo>
-                    <a:pt x="3724371" y="1359091"/>
-                  </a:lnTo>
-                  <a:lnTo>
-                    <a:pt x="3795993" y="1543871"/>
-                  </a:lnTo>
-                  <a:lnTo>
-                    <a:pt x="3867616" y="1712582"/>
-                  </a:lnTo>
-                  <a:lnTo>
-                    <a:pt x="3939238" y="1866619"/>
-                  </a:lnTo>
-                  <a:lnTo>
-                    <a:pt x="4010861" y="2007260"/>
-                  </a:lnTo>
-                  <a:lnTo>
-                    <a:pt x="4082483" y="2135670"/>
-                  </a:lnTo>
-                  <a:lnTo>
-                    <a:pt x="4154106" y="2252911"/>
-                  </a:lnTo>
-                  <a:lnTo>
-                    <a:pt x="4225729" y="2359957"/>
-                  </a:lnTo>
-                  <a:lnTo>
-                    <a:pt x="4297351" y="2457692"/>
-                  </a:lnTo>
-                  <a:lnTo>
-                    <a:pt x="4368974" y="2546928"/>
-                  </a:lnTo>
-                  <a:lnTo>
-                    <a:pt x="4440596" y="2628403"/>
-                  </a:lnTo>
-                  <a:lnTo>
-                    <a:pt x="4512219" y="2649598"/>
-                  </a:lnTo>
-                  <a:lnTo>
-                    <a:pt x="4583841" y="2642474"/>
-                  </a:lnTo>
-                  <a:lnTo>
-                    <a:pt x="4655464" y="2635290"/>
-                  </a:lnTo>
-                  <a:lnTo>
-                    <a:pt x="4727086" y="2628044"/>
-                  </a:lnTo>
-                  <a:lnTo>
-                    <a:pt x="4798709" y="2620736"/>
-                  </a:lnTo>
-                  <a:lnTo>
-                    <a:pt x="4870331" y="2613366"/>
-                  </a:lnTo>
-                  <a:lnTo>
-                    <a:pt x="4941954" y="2605933"/>
-                  </a:lnTo>
-                  <a:lnTo>
-                    <a:pt x="5013576" y="2598437"/>
-                  </a:lnTo>
-                  <a:lnTo>
-                    <a:pt x="5085199" y="2590876"/>
-                  </a:lnTo>
-                  <a:lnTo>
-                    <a:pt x="5156821" y="2583251"/>
-                  </a:lnTo>
-                  <a:lnTo>
-                    <a:pt x="5228444" y="2575561"/>
-                  </a:lnTo>
-                  <a:lnTo>
-                    <a:pt x="5300066" y="2567805"/>
-                  </a:lnTo>
-                  <a:lnTo>
-                    <a:pt x="5371689" y="2559983"/>
-                  </a:lnTo>
-                  <a:lnTo>
-                    <a:pt x="5443311" y="2552094"/>
-                  </a:lnTo>
-                  <a:lnTo>
-                    <a:pt x="5514934" y="2544138"/>
-                  </a:lnTo>
-                  <a:lnTo>
-                    <a:pt x="5586557" y="2536114"/>
-                  </a:lnTo>
-                  <a:lnTo>
-                    <a:pt x="5658179" y="2528021"/>
-                  </a:lnTo>
-                  <a:lnTo>
-                    <a:pt x="5729802" y="2519859"/>
-                  </a:lnTo>
-                  <a:lnTo>
-                    <a:pt x="5801424" y="2511627"/>
-                  </a:lnTo>
-                  <a:lnTo>
-                    <a:pt x="5873047" y="2503326"/>
-                  </a:lnTo>
-                  <a:lnTo>
-                    <a:pt x="5944669" y="2494953"/>
-                  </a:lnTo>
-                  <a:lnTo>
-                    <a:pt x="6016292" y="2486509"/>
-                  </a:lnTo>
-                  <a:lnTo>
-                    <a:pt x="6087914" y="2477992"/>
-                  </a:lnTo>
-                  <a:lnTo>
-                    <a:pt x="6159537" y="2469403"/>
-                  </a:lnTo>
-                  <a:lnTo>
-                    <a:pt x="6231159" y="2460741"/>
-                  </a:lnTo>
-                  <a:lnTo>
-                    <a:pt x="6302782" y="2452004"/>
-                  </a:lnTo>
-                  <a:lnTo>
-                    <a:pt x="6374404" y="2443193"/>
-                  </a:lnTo>
-                  <a:lnTo>
-                    <a:pt x="6446027" y="2434307"/>
-                  </a:lnTo>
-                  <a:lnTo>
-                    <a:pt x="6517649" y="2425345"/>
-                  </a:lnTo>
-                  <a:lnTo>
-                    <a:pt x="6589272" y="2416306"/>
-                  </a:lnTo>
-                  <a:lnTo>
-                    <a:pt x="6660894" y="2407190"/>
-                  </a:lnTo>
-                  <a:lnTo>
-                    <a:pt x="6732517" y="2397996"/>
-                  </a:lnTo>
-                  <a:lnTo>
-                    <a:pt x="6804139" y="2388724"/>
-                  </a:lnTo>
-                  <a:lnTo>
-                    <a:pt x="6875762" y="2379372"/>
-                  </a:lnTo>
-                  <a:lnTo>
-                    <a:pt x="6947385" y="2369941"/>
-                  </a:lnTo>
-                  <a:lnTo>
-                    <a:pt x="7019007" y="2360429"/>
-                  </a:lnTo>
-                  <a:lnTo>
-                    <a:pt x="7090630" y="2350836"/>
-                  </a:lnTo>
-                  <a:lnTo>
-                    <a:pt x="7090630" y="3454228"/>
-                  </a:lnTo>
-                  <a:lnTo>
-                    <a:pt x="7019007" y="3451416"/>
-                  </a:lnTo>
-                  <a:lnTo>
-                    <a:pt x="6947385" y="3448337"/>
-                  </a:lnTo>
-                  <a:lnTo>
-                    <a:pt x="6875762" y="3444964"/>
-                  </a:lnTo>
-                  <a:lnTo>
-                    <a:pt x="6804139" y="3441270"/>
-                  </a:lnTo>
-                  <a:lnTo>
-                    <a:pt x="6732517" y="3437223"/>
-                  </a:lnTo>
-                  <a:lnTo>
-                    <a:pt x="6660894" y="3432792"/>
-                  </a:lnTo>
-                  <a:lnTo>
-                    <a:pt x="6589272" y="3427938"/>
-                  </a:lnTo>
-                  <a:lnTo>
-                    <a:pt x="6517649" y="3422622"/>
-                  </a:lnTo>
-                  <a:lnTo>
-                    <a:pt x="6446027" y="3416800"/>
-                  </a:lnTo>
-                  <a:lnTo>
-                    <a:pt x="6374404" y="3410423"/>
-                  </a:lnTo>
-                  <a:lnTo>
-                    <a:pt x="6302782" y="3403439"/>
-                  </a:lnTo>
-                  <a:lnTo>
-                    <a:pt x="6231159" y="3395789"/>
-                  </a:lnTo>
-                  <a:lnTo>
-                    <a:pt x="6159537" y="3387411"/>
-                  </a:lnTo>
-                  <a:lnTo>
-                    <a:pt x="6087914" y="3378235"/>
-                  </a:lnTo>
-                  <a:lnTo>
-                    <a:pt x="6016292" y="3368184"/>
-                  </a:lnTo>
-                  <a:lnTo>
-                    <a:pt x="5944669" y="3357177"/>
-                  </a:lnTo>
-                  <a:lnTo>
-                    <a:pt x="5873047" y="3345120"/>
-                  </a:lnTo>
-                  <a:lnTo>
-                    <a:pt x="5801424" y="3331916"/>
-                  </a:lnTo>
-                  <a:lnTo>
-                    <a:pt x="5729802" y="3317453"/>
-                  </a:lnTo>
-                  <a:lnTo>
-                    <a:pt x="5658179" y="3301613"/>
-                  </a:lnTo>
-                  <a:lnTo>
-                    <a:pt x="5586557" y="3284264"/>
-                  </a:lnTo>
-                  <a:lnTo>
-                    <a:pt x="5514934" y="3265263"/>
-                  </a:lnTo>
-                  <a:lnTo>
-                    <a:pt x="5443311" y="3244451"/>
-                  </a:lnTo>
-                  <a:lnTo>
-                    <a:pt x="5371689" y="3221658"/>
-                  </a:lnTo>
-                  <a:lnTo>
-                    <a:pt x="5300066" y="3196693"/>
-                  </a:lnTo>
-                  <a:lnTo>
-                    <a:pt x="5228444" y="3169350"/>
-                  </a:lnTo>
-                  <a:lnTo>
-                    <a:pt x="5156821" y="3139402"/>
-                  </a:lnTo>
-                  <a:lnTo>
-                    <a:pt x="5085199" y="3106602"/>
-                  </a:lnTo>
-                  <a:lnTo>
-                    <a:pt x="5013576" y="3070678"/>
-                  </a:lnTo>
-                  <a:lnTo>
-                    <a:pt x="4941954" y="3031331"/>
-                  </a:lnTo>
-                  <a:lnTo>
-                    <a:pt x="4870331" y="2988237"/>
-                  </a:lnTo>
-                  <a:lnTo>
-                    <a:pt x="4798709" y="2941038"/>
-                  </a:lnTo>
-                  <a:lnTo>
-                    <a:pt x="4727086" y="2889343"/>
-                  </a:lnTo>
-                  <a:lnTo>
-                    <a:pt x="4655464" y="2832723"/>
-                  </a:lnTo>
-                  <a:lnTo>
-                    <a:pt x="4583841" y="2770711"/>
-                  </a:lnTo>
-                  <a:lnTo>
-                    <a:pt x="4512219" y="2702792"/>
-                  </a:lnTo>
-                  <a:lnTo>
-                    <a:pt x="4440596" y="2656661"/>
-                  </a:lnTo>
-                  <a:lnTo>
-                    <a:pt x="4368974" y="2663665"/>
-                  </a:lnTo>
-                  <a:lnTo>
-                    <a:pt x="4297351" y="2670609"/>
-                  </a:lnTo>
-                  <a:lnTo>
-                    <a:pt x="4225729" y="2677494"/>
-                  </a:lnTo>
-                  <a:lnTo>
-                    <a:pt x="4154106" y="2684321"/>
-                  </a:lnTo>
-                  <a:lnTo>
-                    <a:pt x="4082483" y="2691091"/>
-                  </a:lnTo>
-                  <a:lnTo>
-                    <a:pt x="4010861" y="2697803"/>
-                  </a:lnTo>
-                  <a:lnTo>
-                    <a:pt x="3939238" y="2704458"/>
-                  </a:lnTo>
-                  <a:lnTo>
-                    <a:pt x="3867616" y="2711056"/>
-                  </a:lnTo>
-                  <a:lnTo>
-                    <a:pt x="3795993" y="2717599"/>
-                  </a:lnTo>
-                  <a:lnTo>
-                    <a:pt x="3724371" y="2724087"/>
-                  </a:lnTo>
-                  <a:lnTo>
-                    <a:pt x="3652748" y="2730519"/>
-                  </a:lnTo>
-                  <a:lnTo>
-                    <a:pt x="3581126" y="2736897"/>
-                  </a:lnTo>
-                  <a:lnTo>
-                    <a:pt x="3509503" y="2743221"/>
-                  </a:lnTo>
-                  <a:lnTo>
-                    <a:pt x="3437881" y="2749492"/>
-                  </a:lnTo>
-                  <a:lnTo>
-                    <a:pt x="3366258" y="2755709"/>
-                  </a:lnTo>
-                  <a:lnTo>
-                    <a:pt x="3294636" y="2761874"/>
-                  </a:lnTo>
-                  <a:lnTo>
-                    <a:pt x="3223013" y="2767987"/>
-                  </a:lnTo>
-                  <a:lnTo>
-                    <a:pt x="3151391" y="2774048"/>
-                  </a:lnTo>
-                  <a:lnTo>
-                    <a:pt x="3079768" y="2780057"/>
-                  </a:lnTo>
-                  <a:lnTo>
-                    <a:pt x="3008146" y="2786016"/>
-                  </a:lnTo>
-                  <a:lnTo>
-                    <a:pt x="2936523" y="2791924"/>
-                  </a:lnTo>
-                  <a:lnTo>
-                    <a:pt x="2864901" y="2797782"/>
-                  </a:lnTo>
-                  <a:lnTo>
-                    <a:pt x="2793278" y="2803590"/>
-                  </a:lnTo>
-                  <a:lnTo>
-                    <a:pt x="2721655" y="2809350"/>
-                  </a:lnTo>
-                  <a:lnTo>
-                    <a:pt x="2650033" y="2815060"/>
-                  </a:lnTo>
-                  <a:lnTo>
-                    <a:pt x="2578410" y="2820723"/>
-                  </a:lnTo>
-                  <a:lnTo>
-                    <a:pt x="2506788" y="2826337"/>
-                  </a:lnTo>
-                  <a:lnTo>
-                    <a:pt x="2435165" y="2831903"/>
-                  </a:lnTo>
-                  <a:lnTo>
-                    <a:pt x="2363543" y="2837423"/>
-                  </a:lnTo>
-                  <a:lnTo>
-                    <a:pt x="2291920" y="2842896"/>
-                  </a:lnTo>
-                  <a:lnTo>
-                    <a:pt x="2220298" y="2848322"/>
-                  </a:lnTo>
-                  <a:lnTo>
-                    <a:pt x="2148675" y="2853703"/>
-                  </a:lnTo>
-                  <a:lnTo>
-                    <a:pt x="2077053" y="2859038"/>
-                  </a:lnTo>
-                  <a:lnTo>
-                    <a:pt x="2005430" y="2864328"/>
-                  </a:lnTo>
-                  <a:lnTo>
-                    <a:pt x="1933808" y="2869573"/>
-                  </a:lnTo>
-                  <a:lnTo>
-                    <a:pt x="1862185" y="2874773"/>
-                  </a:lnTo>
-                  <a:lnTo>
-                    <a:pt x="1790563" y="2879930"/>
-                  </a:lnTo>
-                  <a:lnTo>
-                    <a:pt x="1718940" y="2885043"/>
-                  </a:lnTo>
-                  <a:lnTo>
-                    <a:pt x="1647318" y="2890113"/>
-                  </a:lnTo>
-                  <a:lnTo>
-                    <a:pt x="1575695" y="2895139"/>
-                  </a:lnTo>
-                  <a:lnTo>
-                    <a:pt x="1504073" y="2900123"/>
-                  </a:lnTo>
-                  <a:lnTo>
-                    <a:pt x="1432450" y="2905065"/>
-                  </a:lnTo>
-                  <a:lnTo>
-                    <a:pt x="1360827" y="2909965"/>
-                  </a:lnTo>
-                  <a:lnTo>
-                    <a:pt x="1289205" y="2914824"/>
-                  </a:lnTo>
-                  <a:lnTo>
-                    <a:pt x="1217582" y="2919641"/>
-                  </a:lnTo>
-                  <a:lnTo>
-                    <a:pt x="1145960" y="2924418"/>
-                  </a:lnTo>
-                  <a:lnTo>
-                    <a:pt x="1074337" y="2929154"/>
-                  </a:lnTo>
-                  <a:lnTo>
-                    <a:pt x="1002715" y="2933850"/>
-                  </a:lnTo>
-                  <a:lnTo>
-                    <a:pt x="931092" y="2938507"/>
-                  </a:lnTo>
-                  <a:lnTo>
-                    <a:pt x="859470" y="2943124"/>
-                  </a:lnTo>
-                  <a:lnTo>
-                    <a:pt x="787847" y="2947701"/>
-                  </a:lnTo>
-                  <a:lnTo>
-                    <a:pt x="716225" y="2952240"/>
-                  </a:lnTo>
-                  <a:lnTo>
-                    <a:pt x="644602" y="2956741"/>
-                  </a:lnTo>
-                  <a:lnTo>
-                    <a:pt x="572980" y="2961204"/>
-                  </a:lnTo>
-                  <a:lnTo>
-                    <a:pt x="501357" y="2965628"/>
-                  </a:lnTo>
-                  <a:lnTo>
-                    <a:pt x="429735" y="2970015"/>
-                  </a:lnTo>
-                  <a:lnTo>
-                    <a:pt x="358112" y="2974366"/>
-                  </a:lnTo>
-                  <a:lnTo>
-                    <a:pt x="286490" y="2978679"/>
-                  </a:lnTo>
-                  <a:lnTo>
-                    <a:pt x="214867" y="2982956"/>
-                  </a:lnTo>
-                  <a:lnTo>
-                    <a:pt x="143245" y="2987196"/>
-                  </a:lnTo>
-                  <a:lnTo>
-                    <a:pt x="71622" y="2991401"/>
-                  </a:lnTo>
-                  <a:lnTo>
-                    <a:pt x="0" y="2995570"/>
+                    <a:pt x="3366258" y="44011"/>
+                  </a:lnTo>
+                  <a:lnTo>
+                    <a:pt x="3437881" y="343562"/>
+                  </a:lnTo>
+                  <a:lnTo>
+                    <a:pt x="3509503" y="617027"/>
+                  </a:lnTo>
+                  <a:lnTo>
+                    <a:pt x="3581126" y="866677"/>
+                  </a:lnTo>
+                  <a:lnTo>
+                    <a:pt x="3652748" y="1094586"/>
+                  </a:lnTo>
+                  <a:lnTo>
+                    <a:pt x="3724371" y="1302647"/>
+                  </a:lnTo>
+                  <a:lnTo>
+                    <a:pt x="3795993" y="1492590"/>
+                  </a:lnTo>
+                  <a:lnTo>
+                    <a:pt x="3867616" y="1665991"/>
+                  </a:lnTo>
+                  <a:lnTo>
+                    <a:pt x="3939238" y="1824291"/>
+                  </a:lnTo>
+                  <a:lnTo>
+                    <a:pt x="4010861" y="1968805"/>
+                  </a:lnTo>
+                  <a:lnTo>
+                    <a:pt x="4082483" y="2100735"/>
+                  </a:lnTo>
+                  <a:lnTo>
+                    <a:pt x="4154106" y="2221175"/>
+                  </a:lnTo>
+                  <a:lnTo>
+                    <a:pt x="4225729" y="2331127"/>
+                  </a:lnTo>
+                  <a:lnTo>
+                    <a:pt x="4297351" y="2431503"/>
+                  </a:lnTo>
+                  <a:lnTo>
+                    <a:pt x="4368974" y="2523139"/>
+                  </a:lnTo>
+                  <a:lnTo>
+                    <a:pt x="4440596" y="2606794"/>
+                  </a:lnTo>
+                  <a:lnTo>
+                    <a:pt x="4512219" y="2651531"/>
+                  </a:lnTo>
+                  <a:lnTo>
+                    <a:pt x="4583841" y="2644414"/>
+                  </a:lnTo>
+                  <a:lnTo>
+                    <a:pt x="4655464" y="2637236"/>
+                  </a:lnTo>
+                  <a:lnTo>
+                    <a:pt x="4727086" y="2629997"/>
+                  </a:lnTo>
+                  <a:lnTo>
+                    <a:pt x="4798709" y="2622696"/>
+                  </a:lnTo>
+                  <a:lnTo>
+                    <a:pt x="4870331" y="2615332"/>
+                  </a:lnTo>
+                  <a:lnTo>
+                    <a:pt x="4941954" y="2607905"/>
+                  </a:lnTo>
+                  <a:lnTo>
+                    <a:pt x="5013576" y="2600415"/>
+                  </a:lnTo>
+                  <a:lnTo>
+                    <a:pt x="5085199" y="2592861"/>
+                  </a:lnTo>
+                  <a:lnTo>
+                    <a:pt x="5156821" y="2585242"/>
+                  </a:lnTo>
+                  <a:lnTo>
+                    <a:pt x="5228444" y="2577558"/>
+                  </a:lnTo>
+                  <a:lnTo>
+                    <a:pt x="5300066" y="2569809"/>
+                  </a:lnTo>
+                  <a:lnTo>
+                    <a:pt x="5371689" y="2561993"/>
+                  </a:lnTo>
+                  <a:lnTo>
+                    <a:pt x="5443311" y="2554110"/>
+                  </a:lnTo>
+                  <a:lnTo>
+                    <a:pt x="5514934" y="2546160"/>
+                  </a:lnTo>
+                  <a:lnTo>
+                    <a:pt x="5586557" y="2538142"/>
+                  </a:lnTo>
+                  <a:lnTo>
+                    <a:pt x="5658179" y="2530055"/>
+                  </a:lnTo>
+                  <a:lnTo>
+                    <a:pt x="5729802" y="2521899"/>
+                  </a:lnTo>
+                  <a:lnTo>
+                    <a:pt x="5801424" y="2513673"/>
+                  </a:lnTo>
+                  <a:lnTo>
+                    <a:pt x="5873047" y="2505377"/>
+                  </a:lnTo>
+                  <a:lnTo>
+                    <a:pt x="5944669" y="2497010"/>
+                  </a:lnTo>
+                  <a:lnTo>
+                    <a:pt x="6016292" y="2488572"/>
+                  </a:lnTo>
+                  <a:lnTo>
+                    <a:pt x="6087914" y="2480061"/>
+                  </a:lnTo>
+                  <a:lnTo>
+                    <a:pt x="6159537" y="2471478"/>
+                  </a:lnTo>
+                  <a:lnTo>
+                    <a:pt x="6231159" y="2462821"/>
+                  </a:lnTo>
+                  <a:lnTo>
+                    <a:pt x="6302782" y="2454090"/>
+                  </a:lnTo>
+                  <a:lnTo>
+                    <a:pt x="6374404" y="2445284"/>
+                  </a:lnTo>
+                  <a:lnTo>
+                    <a:pt x="6446027" y="2436404"/>
+                  </a:lnTo>
+                  <a:lnTo>
+                    <a:pt x="6517649" y="2427447"/>
+                  </a:lnTo>
+                  <a:lnTo>
+                    <a:pt x="6589272" y="2418413"/>
+                  </a:lnTo>
+                  <a:lnTo>
+                    <a:pt x="6660894" y="2409303"/>
+                  </a:lnTo>
+                  <a:lnTo>
+                    <a:pt x="6732517" y="2400114"/>
+                  </a:lnTo>
+                  <a:lnTo>
+                    <a:pt x="6804139" y="2390847"/>
+                  </a:lnTo>
+                  <a:lnTo>
+                    <a:pt x="6875762" y="2381501"/>
+                  </a:lnTo>
+                  <a:lnTo>
+                    <a:pt x="6947385" y="2372074"/>
+                  </a:lnTo>
+                  <a:lnTo>
+                    <a:pt x="7019007" y="2362567"/>
+                  </a:lnTo>
+                  <a:lnTo>
+                    <a:pt x="7090630" y="2352979"/>
+                  </a:lnTo>
+                  <a:lnTo>
+                    <a:pt x="7090630" y="3453624"/>
+                  </a:lnTo>
+                  <a:lnTo>
+                    <a:pt x="7019007" y="3450751"/>
+                  </a:lnTo>
+                  <a:lnTo>
+                    <a:pt x="6947385" y="3447603"/>
+                  </a:lnTo>
+                  <a:lnTo>
+                    <a:pt x="6875762" y="3444155"/>
+                  </a:lnTo>
+                  <a:lnTo>
+                    <a:pt x="6804139" y="3440378"/>
+                  </a:lnTo>
+                  <a:lnTo>
+                    <a:pt x="6732517" y="3436241"/>
+                  </a:lnTo>
+                  <a:lnTo>
+                    <a:pt x="6660894" y="3431710"/>
+                  </a:lnTo>
+                  <a:lnTo>
+                    <a:pt x="6589272" y="3426746"/>
+                  </a:lnTo>
+                  <a:lnTo>
+                    <a:pt x="6517649" y="3421308"/>
+                  </a:lnTo>
+                  <a:lnTo>
+                    <a:pt x="6446027" y="3415352"/>
+                  </a:lnTo>
+                  <a:lnTo>
+                    <a:pt x="6374404" y="3408828"/>
+                  </a:lnTo>
+                  <a:lnTo>
+                    <a:pt x="6302782" y="3401681"/>
+                  </a:lnTo>
+                  <a:lnTo>
+                    <a:pt x="6231159" y="3393853"/>
+                  </a:lnTo>
+                  <a:lnTo>
+                    <a:pt x="6159537" y="3385278"/>
+                  </a:lnTo>
+                  <a:lnTo>
+                    <a:pt x="6087914" y="3375885"/>
+                  </a:lnTo>
+                  <a:lnTo>
+                    <a:pt x="6016292" y="3365595"/>
+                  </a:lnTo>
+                  <a:lnTo>
+                    <a:pt x="5944669" y="3354324"/>
+                  </a:lnTo>
+                  <a:lnTo>
+                    <a:pt x="5873047" y="3341979"/>
+                  </a:lnTo>
+                  <a:lnTo>
+                    <a:pt x="5801424" y="3328455"/>
+                  </a:lnTo>
+                  <a:lnTo>
+                    <a:pt x="5729802" y="3313641"/>
+                  </a:lnTo>
+                  <a:lnTo>
+                    <a:pt x="5658179" y="3297414"/>
+                  </a:lnTo>
+                  <a:lnTo>
+                    <a:pt x="5586557" y="3279640"/>
+                  </a:lnTo>
+                  <a:lnTo>
+                    <a:pt x="5514934" y="3260169"/>
+                  </a:lnTo>
+                  <a:lnTo>
+                    <a:pt x="5443311" y="3238842"/>
+                  </a:lnTo>
+                  <a:lnTo>
+                    <a:pt x="5371689" y="3215479"/>
+                  </a:lnTo>
+                  <a:lnTo>
+                    <a:pt x="5300066" y="3189889"/>
+                  </a:lnTo>
+                  <a:lnTo>
+                    <a:pt x="5228444" y="3161857"/>
+                  </a:lnTo>
+                  <a:lnTo>
+                    <a:pt x="5156821" y="3131151"/>
+                  </a:lnTo>
+                  <a:lnTo>
+                    <a:pt x="5085199" y="3097516"/>
+                  </a:lnTo>
+                  <a:lnTo>
+                    <a:pt x="5013576" y="3060672"/>
+                  </a:lnTo>
+                  <a:lnTo>
+                    <a:pt x="4941954" y="3020314"/>
+                  </a:lnTo>
+                  <a:lnTo>
+                    <a:pt x="4870331" y="2976105"/>
+                  </a:lnTo>
+                  <a:lnTo>
+                    <a:pt x="4798709" y="2927680"/>
+                  </a:lnTo>
+                  <a:lnTo>
+                    <a:pt x="4727086" y="2874635"/>
+                  </a:lnTo>
+                  <a:lnTo>
+                    <a:pt x="4655464" y="2816530"/>
+                  </a:lnTo>
+                  <a:lnTo>
+                    <a:pt x="4583841" y="2752883"/>
+                  </a:lnTo>
+                  <a:lnTo>
+                    <a:pt x="4512219" y="2683164"/>
+                  </a:lnTo>
+                  <a:lnTo>
+                    <a:pt x="4440596" y="2658588"/>
+                  </a:lnTo>
+                  <a:lnTo>
+                    <a:pt x="4368974" y="2665585"/>
+                  </a:lnTo>
+                  <a:lnTo>
+                    <a:pt x="4297351" y="2672522"/>
+                  </a:lnTo>
+                  <a:lnTo>
+                    <a:pt x="4225729" y="2679401"/>
+                  </a:lnTo>
+                  <a:lnTo>
+                    <a:pt x="4154106" y="2686221"/>
+                  </a:lnTo>
+                  <a:lnTo>
+                    <a:pt x="4082483" y="2692984"/>
+                  </a:lnTo>
+                  <a:lnTo>
+                    <a:pt x="4010861" y="2699689"/>
+                  </a:lnTo>
+                  <a:lnTo>
+                    <a:pt x="3939238" y="2706337"/>
+                  </a:lnTo>
+                  <a:lnTo>
+                    <a:pt x="3867616" y="2712929"/>
+                  </a:lnTo>
+                  <a:lnTo>
+                    <a:pt x="3795993" y="2719465"/>
+                  </a:lnTo>
+                  <a:lnTo>
+                    <a:pt x="3724371" y="2725946"/>
+                  </a:lnTo>
+                  <a:lnTo>
+                    <a:pt x="3652748" y="2732372"/>
+                  </a:lnTo>
+                  <a:lnTo>
+                    <a:pt x="3581126" y="2738743"/>
+                  </a:lnTo>
+                  <a:lnTo>
+                    <a:pt x="3509503" y="2745060"/>
+                  </a:lnTo>
+                  <a:lnTo>
+                    <a:pt x="3437881" y="2751324"/>
+                  </a:lnTo>
+                  <a:lnTo>
+                    <a:pt x="3366258" y="2757534"/>
+                  </a:lnTo>
+                  <a:lnTo>
+                    <a:pt x="3294636" y="2763692"/>
+                  </a:lnTo>
+                  <a:lnTo>
+                    <a:pt x="3223013" y="2769798"/>
+                  </a:lnTo>
+                  <a:lnTo>
+                    <a:pt x="3151391" y="2775851"/>
+                  </a:lnTo>
+                  <a:lnTo>
+                    <a:pt x="3079768" y="2781854"/>
+                  </a:lnTo>
+                  <a:lnTo>
+                    <a:pt x="3008146" y="2787806"/>
+                  </a:lnTo>
+                  <a:lnTo>
+                    <a:pt x="2936523" y="2793707"/>
+                  </a:lnTo>
+                  <a:lnTo>
+                    <a:pt x="2864901" y="2799558"/>
+                  </a:lnTo>
+                  <a:lnTo>
+                    <a:pt x="2793278" y="2805359"/>
+                  </a:lnTo>
+                  <a:lnTo>
+                    <a:pt x="2721655" y="2811112"/>
+                  </a:lnTo>
+                  <a:lnTo>
+                    <a:pt x="2650033" y="2816815"/>
+                  </a:lnTo>
+                  <a:lnTo>
+                    <a:pt x="2578410" y="2822470"/>
+                  </a:lnTo>
+                  <a:lnTo>
+                    <a:pt x="2506788" y="2828078"/>
+                  </a:lnTo>
+                  <a:lnTo>
+                    <a:pt x="2435165" y="2833637"/>
+                  </a:lnTo>
+                  <a:lnTo>
+                    <a:pt x="2363543" y="2839150"/>
+                  </a:lnTo>
+                  <a:lnTo>
+                    <a:pt x="2291920" y="2844616"/>
+                  </a:lnTo>
+                  <a:lnTo>
+                    <a:pt x="2220298" y="2850035"/>
+                  </a:lnTo>
+                  <a:lnTo>
+                    <a:pt x="2148675" y="2855409"/>
+                  </a:lnTo>
+                  <a:lnTo>
+                    <a:pt x="2077053" y="2860737"/>
+                  </a:lnTo>
+                  <a:lnTo>
+                    <a:pt x="2005430" y="2866019"/>
+                  </a:lnTo>
+                  <a:lnTo>
+                    <a:pt x="1933808" y="2871257"/>
+                  </a:lnTo>
+                  <a:lnTo>
+                    <a:pt x="1862185" y="2876451"/>
+                  </a:lnTo>
+                  <a:lnTo>
+                    <a:pt x="1790563" y="2881600"/>
+                  </a:lnTo>
+                  <a:lnTo>
+                    <a:pt x="1718940" y="2886706"/>
+                  </a:lnTo>
+                  <a:lnTo>
+                    <a:pt x="1647318" y="2891769"/>
+                  </a:lnTo>
+                  <a:lnTo>
+                    <a:pt x="1575695" y="2896788"/>
+                  </a:lnTo>
+                  <a:lnTo>
+                    <a:pt x="1504073" y="2901765"/>
+                  </a:lnTo>
+                  <a:lnTo>
+                    <a:pt x="1432450" y="2906700"/>
+                  </a:lnTo>
+                  <a:lnTo>
+                    <a:pt x="1360827" y="2911593"/>
+                  </a:lnTo>
+                  <a:lnTo>
+                    <a:pt x="1289205" y="2916445"/>
+                  </a:lnTo>
+                  <a:lnTo>
+                    <a:pt x="1217582" y="2921255"/>
+                  </a:lnTo>
+                  <a:lnTo>
+                    <a:pt x="1145960" y="2926025"/>
+                  </a:lnTo>
+                  <a:lnTo>
+                    <a:pt x="1074337" y="2930754"/>
+                  </a:lnTo>
+                  <a:lnTo>
+                    <a:pt x="1002715" y="2935443"/>
+                  </a:lnTo>
+                  <a:lnTo>
+                    <a:pt x="931092" y="2940092"/>
+                  </a:lnTo>
+                  <a:lnTo>
+                    <a:pt x="859470" y="2944702"/>
+                  </a:lnTo>
+                  <a:lnTo>
+                    <a:pt x="787847" y="2949273"/>
+                  </a:lnTo>
+                  <a:lnTo>
+                    <a:pt x="716225" y="2953805"/>
+                  </a:lnTo>
+                  <a:lnTo>
+                    <a:pt x="644602" y="2958299"/>
+                  </a:lnTo>
+                  <a:lnTo>
+                    <a:pt x="572980" y="2962754"/>
+                  </a:lnTo>
+                  <a:lnTo>
+                    <a:pt x="501357" y="2967172"/>
+                  </a:lnTo>
+                  <a:lnTo>
+                    <a:pt x="429735" y="2971552"/>
+                  </a:lnTo>
+                  <a:lnTo>
+                    <a:pt x="358112" y="2975895"/>
+                  </a:lnTo>
+                  <a:lnTo>
+                    <a:pt x="286490" y="2980201"/>
+                  </a:lnTo>
+                  <a:lnTo>
+                    <a:pt x="214867" y="2984471"/>
+                  </a:lnTo>
+                  <a:lnTo>
+                    <a:pt x="143245" y="2988705"/>
+                  </a:lnTo>
+                  <a:lnTo>
+                    <a:pt x="71622" y="2992902"/>
+                  </a:lnTo>
+                  <a:lnTo>
+                    <a:pt x="0" y="2997064"/>
                   </a:lnTo>
                   <a:lnTo>
                     <a:pt x="0" y="0"/>
@@ -3412,174 +3412,174 @@
           </p:nvSpPr>
           <p:spPr>
             <a:xfrm>
-              <a:off x="4507960" y="2073503"/>
-              <a:ext cx="3754719" cy="2649598"/>
+              <a:off x="4528701" y="2073503"/>
+              <a:ext cx="3733978" cy="2651531"/>
             </a:xfrm>
             <a:custGeom>
               <a:avLst/>
               <a:pathLst>
-                <a:path w="3754719" h="2649598">
+                <a:path w="3733978" h="2651531">
                   <a:moveTo>
                     <a:pt x="0" y="0"/>
                   </a:moveTo>
                   <a:lnTo>
-                    <a:pt x="30348" y="135153"/>
-                  </a:lnTo>
-                  <a:lnTo>
-                    <a:pt x="101970" y="426379"/>
-                  </a:lnTo>
-                  <a:lnTo>
-                    <a:pt x="173593" y="692277"/>
-                  </a:lnTo>
-                  <a:lnTo>
-                    <a:pt x="245215" y="935050"/>
-                  </a:lnTo>
-                  <a:lnTo>
-                    <a:pt x="316838" y="1156709"/>
-                  </a:lnTo>
-                  <a:lnTo>
-                    <a:pt x="388460" y="1359091"/>
-                  </a:lnTo>
-                  <a:lnTo>
-                    <a:pt x="460083" y="1543871"/>
-                  </a:lnTo>
-                  <a:lnTo>
-                    <a:pt x="531705" y="1712582"/>
-                  </a:lnTo>
-                  <a:lnTo>
-                    <a:pt x="603328" y="1866619"/>
-                  </a:lnTo>
-                  <a:lnTo>
-                    <a:pt x="674950" y="2007260"/>
-                  </a:lnTo>
-                  <a:lnTo>
-                    <a:pt x="746573" y="2135670"/>
-                  </a:lnTo>
-                  <a:lnTo>
-                    <a:pt x="818195" y="2252911"/>
-                  </a:lnTo>
-                  <a:lnTo>
-                    <a:pt x="889818" y="2359957"/>
-                  </a:lnTo>
-                  <a:lnTo>
-                    <a:pt x="961440" y="2457692"/>
-                  </a:lnTo>
-                  <a:lnTo>
-                    <a:pt x="1033063" y="2546928"/>
-                  </a:lnTo>
-                  <a:lnTo>
-                    <a:pt x="1104685" y="2628403"/>
-                  </a:lnTo>
-                  <a:lnTo>
-                    <a:pt x="1176308" y="2649598"/>
-                  </a:lnTo>
-                  <a:lnTo>
-                    <a:pt x="1247931" y="2642474"/>
-                  </a:lnTo>
-                  <a:lnTo>
-                    <a:pt x="1319553" y="2635290"/>
-                  </a:lnTo>
-                  <a:lnTo>
-                    <a:pt x="1391176" y="2628044"/>
-                  </a:lnTo>
-                  <a:lnTo>
-                    <a:pt x="1462798" y="2620736"/>
-                  </a:lnTo>
-                  <a:lnTo>
-                    <a:pt x="1534421" y="2613366"/>
-                  </a:lnTo>
-                  <a:lnTo>
-                    <a:pt x="1606043" y="2605933"/>
-                  </a:lnTo>
-                  <a:lnTo>
-                    <a:pt x="1677666" y="2598437"/>
-                  </a:lnTo>
-                  <a:lnTo>
-                    <a:pt x="1749288" y="2590876"/>
-                  </a:lnTo>
-                  <a:lnTo>
-                    <a:pt x="1820911" y="2583251"/>
-                  </a:lnTo>
-                  <a:lnTo>
-                    <a:pt x="1892533" y="2575561"/>
-                  </a:lnTo>
-                  <a:lnTo>
-                    <a:pt x="1964156" y="2567805"/>
-                  </a:lnTo>
-                  <a:lnTo>
-                    <a:pt x="2035778" y="2559983"/>
-                  </a:lnTo>
-                  <a:lnTo>
-                    <a:pt x="2107401" y="2552094"/>
-                  </a:lnTo>
-                  <a:lnTo>
-                    <a:pt x="2179023" y="2544138"/>
-                  </a:lnTo>
-                  <a:lnTo>
-                    <a:pt x="2250646" y="2536114"/>
-                  </a:lnTo>
-                  <a:lnTo>
-                    <a:pt x="2322268" y="2528021"/>
-                  </a:lnTo>
-                  <a:lnTo>
-                    <a:pt x="2393891" y="2519859"/>
-                  </a:lnTo>
-                  <a:lnTo>
-                    <a:pt x="2465513" y="2511627"/>
-                  </a:lnTo>
-                  <a:lnTo>
-                    <a:pt x="2537136" y="2503326"/>
-                  </a:lnTo>
-                  <a:lnTo>
-                    <a:pt x="2608758" y="2494953"/>
-                  </a:lnTo>
-                  <a:lnTo>
-                    <a:pt x="2680381" y="2486509"/>
-                  </a:lnTo>
-                  <a:lnTo>
-                    <a:pt x="2752004" y="2477992"/>
-                  </a:lnTo>
-                  <a:lnTo>
-                    <a:pt x="2823626" y="2469403"/>
-                  </a:lnTo>
-                  <a:lnTo>
-                    <a:pt x="2895249" y="2460741"/>
-                  </a:lnTo>
-                  <a:lnTo>
-                    <a:pt x="2966871" y="2452004"/>
-                  </a:lnTo>
-                  <a:lnTo>
-                    <a:pt x="3038494" y="2443193"/>
-                  </a:lnTo>
-                  <a:lnTo>
-                    <a:pt x="3110116" y="2434307"/>
-                  </a:lnTo>
-                  <a:lnTo>
-                    <a:pt x="3181739" y="2425345"/>
-                  </a:lnTo>
-                  <a:lnTo>
-                    <a:pt x="3253361" y="2416306"/>
-                  </a:lnTo>
-                  <a:lnTo>
-                    <a:pt x="3324984" y="2407190"/>
-                  </a:lnTo>
-                  <a:lnTo>
-                    <a:pt x="3396606" y="2397996"/>
-                  </a:lnTo>
-                  <a:lnTo>
-                    <a:pt x="3468229" y="2388724"/>
-                  </a:lnTo>
-                  <a:lnTo>
-                    <a:pt x="3539851" y="2379372"/>
-                  </a:lnTo>
-                  <a:lnTo>
-                    <a:pt x="3611474" y="2369941"/>
-                  </a:lnTo>
-                  <a:lnTo>
-                    <a:pt x="3683096" y="2360429"/>
-                  </a:lnTo>
-                  <a:lnTo>
-                    <a:pt x="3754719" y="2350836"/>
+                    <a:pt x="9606" y="44011"/>
+                  </a:lnTo>
+                  <a:lnTo>
+                    <a:pt x="81229" y="343562"/>
+                  </a:lnTo>
+                  <a:lnTo>
+                    <a:pt x="152851" y="617027"/>
+                  </a:lnTo>
+                  <a:lnTo>
+                    <a:pt x="224474" y="866677"/>
+                  </a:lnTo>
+                  <a:lnTo>
+                    <a:pt x="296096" y="1094586"/>
+                  </a:lnTo>
+                  <a:lnTo>
+                    <a:pt x="367719" y="1302647"/>
+                  </a:lnTo>
+                  <a:lnTo>
+                    <a:pt x="439341" y="1492590"/>
+                  </a:lnTo>
+                  <a:lnTo>
+                    <a:pt x="510964" y="1665991"/>
+                  </a:lnTo>
+                  <a:lnTo>
+                    <a:pt x="582586" y="1824291"/>
+                  </a:lnTo>
+                  <a:lnTo>
+                    <a:pt x="654209" y="1968805"/>
+                  </a:lnTo>
+                  <a:lnTo>
+                    <a:pt x="725832" y="2100735"/>
+                  </a:lnTo>
+                  <a:lnTo>
+                    <a:pt x="797454" y="2221175"/>
+                  </a:lnTo>
+                  <a:lnTo>
+                    <a:pt x="869077" y="2331127"/>
+                  </a:lnTo>
+                  <a:lnTo>
+                    <a:pt x="940699" y="2431503"/>
+                  </a:lnTo>
+                  <a:lnTo>
+                    <a:pt x="1012322" y="2523139"/>
+                  </a:lnTo>
+                  <a:lnTo>
+                    <a:pt x="1083944" y="2606794"/>
+                  </a:lnTo>
+                  <a:lnTo>
+                    <a:pt x="1155567" y="2651531"/>
+                  </a:lnTo>
+                  <a:lnTo>
+                    <a:pt x="1227189" y="2644414"/>
+                  </a:lnTo>
+                  <a:lnTo>
+                    <a:pt x="1298812" y="2637236"/>
+                  </a:lnTo>
+                  <a:lnTo>
+                    <a:pt x="1370434" y="2629997"/>
+                  </a:lnTo>
+                  <a:lnTo>
+                    <a:pt x="1442057" y="2622696"/>
+                  </a:lnTo>
+                  <a:lnTo>
+                    <a:pt x="1513679" y="2615332"/>
+                  </a:lnTo>
+                  <a:lnTo>
+                    <a:pt x="1585302" y="2607905"/>
+                  </a:lnTo>
+                  <a:lnTo>
+                    <a:pt x="1656924" y="2600415"/>
+                  </a:lnTo>
+                  <a:lnTo>
+                    <a:pt x="1728547" y="2592861"/>
+                  </a:lnTo>
+                  <a:lnTo>
+                    <a:pt x="1800169" y="2585242"/>
+                  </a:lnTo>
+                  <a:lnTo>
+                    <a:pt x="1871792" y="2577558"/>
+                  </a:lnTo>
+                  <a:lnTo>
+                    <a:pt x="1943414" y="2569809"/>
+                  </a:lnTo>
+                  <a:lnTo>
+                    <a:pt x="2015037" y="2561993"/>
+                  </a:lnTo>
+                  <a:lnTo>
+                    <a:pt x="2086660" y="2554110"/>
+                  </a:lnTo>
+                  <a:lnTo>
+                    <a:pt x="2158282" y="2546160"/>
+                  </a:lnTo>
+                  <a:lnTo>
+                    <a:pt x="2229905" y="2538142"/>
+                  </a:lnTo>
+                  <a:lnTo>
+                    <a:pt x="2301527" y="2530055"/>
+                  </a:lnTo>
+                  <a:lnTo>
+                    <a:pt x="2373150" y="2521899"/>
+                  </a:lnTo>
+                  <a:lnTo>
+                    <a:pt x="2444772" y="2513673"/>
+                  </a:lnTo>
+                  <a:lnTo>
+                    <a:pt x="2516395" y="2505377"/>
+                  </a:lnTo>
+                  <a:lnTo>
+                    <a:pt x="2588017" y="2497010"/>
+                  </a:lnTo>
+                  <a:lnTo>
+                    <a:pt x="2659640" y="2488572"/>
+                  </a:lnTo>
+                  <a:lnTo>
+                    <a:pt x="2731262" y="2480061"/>
+                  </a:lnTo>
+                  <a:lnTo>
+                    <a:pt x="2802885" y="2471478"/>
+                  </a:lnTo>
+                  <a:lnTo>
+                    <a:pt x="2874507" y="2462821"/>
+                  </a:lnTo>
+                  <a:lnTo>
+                    <a:pt x="2946130" y="2454090"/>
+                  </a:lnTo>
+                  <a:lnTo>
+                    <a:pt x="3017752" y="2445284"/>
+                  </a:lnTo>
+                  <a:lnTo>
+                    <a:pt x="3089375" y="2436404"/>
+                  </a:lnTo>
+                  <a:lnTo>
+                    <a:pt x="3160997" y="2427447"/>
+                  </a:lnTo>
+                  <a:lnTo>
+                    <a:pt x="3232620" y="2418413"/>
+                  </a:lnTo>
+                  <a:lnTo>
+                    <a:pt x="3304242" y="2409303"/>
+                  </a:lnTo>
+                  <a:lnTo>
+                    <a:pt x="3375865" y="2400114"/>
+                  </a:lnTo>
+                  <a:lnTo>
+                    <a:pt x="3447488" y="2390847"/>
+                  </a:lnTo>
+                  <a:lnTo>
+                    <a:pt x="3519110" y="2381501"/>
+                  </a:lnTo>
+                  <a:lnTo>
+                    <a:pt x="3590733" y="2372074"/>
+                  </a:lnTo>
+                  <a:lnTo>
+                    <a:pt x="3662355" y="2362567"/>
+                  </a:lnTo>
+                  <a:lnTo>
+                    <a:pt x="3733978" y="2352979"/>
                   </a:lnTo>
                 </a:path>
               </a:pathLst>
@@ -3599,312 +3599,312 @@
           </p:nvSpPr>
           <p:spPr>
             <a:xfrm>
-              <a:off x="1172049" y="4730164"/>
-              <a:ext cx="7090630" cy="797566"/>
+              <a:off x="1172049" y="4732091"/>
+              <a:ext cx="7090630" cy="795036"/>
             </a:xfrm>
             <a:custGeom>
               <a:avLst/>
               <a:pathLst>
-                <a:path w="7090630" h="797566">
+                <a:path w="7090630" h="795036">
                   <a:moveTo>
-                    <a:pt x="7090630" y="797566"/>
+                    <a:pt x="7090630" y="795036"/>
                   </a:moveTo>
                   <a:lnTo>
-                    <a:pt x="7019007" y="794754"/>
-                  </a:lnTo>
-                  <a:lnTo>
-                    <a:pt x="6947385" y="791675"/>
-                  </a:lnTo>
-                  <a:lnTo>
-                    <a:pt x="6875762" y="788302"/>
-                  </a:lnTo>
-                  <a:lnTo>
-                    <a:pt x="6804139" y="784608"/>
-                  </a:lnTo>
-                  <a:lnTo>
-                    <a:pt x="6732517" y="780562"/>
-                  </a:lnTo>
-                  <a:lnTo>
-                    <a:pt x="6660894" y="776130"/>
-                  </a:lnTo>
-                  <a:lnTo>
-                    <a:pt x="6589272" y="771277"/>
-                  </a:lnTo>
-                  <a:lnTo>
-                    <a:pt x="6517649" y="765961"/>
-                  </a:lnTo>
-                  <a:lnTo>
-                    <a:pt x="6446027" y="760138"/>
-                  </a:lnTo>
-                  <a:lnTo>
-                    <a:pt x="6374404" y="753761"/>
-                  </a:lnTo>
-                  <a:lnTo>
-                    <a:pt x="6302782" y="746777"/>
-                  </a:lnTo>
-                  <a:lnTo>
-                    <a:pt x="6231159" y="739127"/>
-                  </a:lnTo>
-                  <a:lnTo>
-                    <a:pt x="6159537" y="730749"/>
-                  </a:lnTo>
-                  <a:lnTo>
-                    <a:pt x="6087914" y="721573"/>
-                  </a:lnTo>
-                  <a:lnTo>
-                    <a:pt x="6016292" y="711523"/>
-                  </a:lnTo>
-                  <a:lnTo>
-                    <a:pt x="5944669" y="700515"/>
-                  </a:lnTo>
-                  <a:lnTo>
-                    <a:pt x="5873047" y="688459"/>
-                  </a:lnTo>
-                  <a:lnTo>
-                    <a:pt x="5801424" y="675254"/>
-                  </a:lnTo>
-                  <a:lnTo>
-                    <a:pt x="5729802" y="660791"/>
-                  </a:lnTo>
-                  <a:lnTo>
-                    <a:pt x="5658179" y="644951"/>
-                  </a:lnTo>
-                  <a:lnTo>
-                    <a:pt x="5586557" y="627602"/>
-                  </a:lnTo>
-                  <a:lnTo>
-                    <a:pt x="5514934" y="608601"/>
-                  </a:lnTo>
-                  <a:lnTo>
-                    <a:pt x="5443311" y="587790"/>
-                  </a:lnTo>
-                  <a:lnTo>
-                    <a:pt x="5371689" y="564996"/>
-                  </a:lnTo>
-                  <a:lnTo>
-                    <a:pt x="5300066" y="540031"/>
-                  </a:lnTo>
-                  <a:lnTo>
-                    <a:pt x="5228444" y="512688"/>
-                  </a:lnTo>
-                  <a:lnTo>
-                    <a:pt x="5156821" y="482740"/>
-                  </a:lnTo>
-                  <a:lnTo>
-                    <a:pt x="5085199" y="449940"/>
-                  </a:lnTo>
-                  <a:lnTo>
-                    <a:pt x="5013576" y="414016"/>
-                  </a:lnTo>
-                  <a:lnTo>
-                    <a:pt x="4941954" y="374669"/>
-                  </a:lnTo>
-                  <a:lnTo>
-                    <a:pt x="4870331" y="331575"/>
-                  </a:lnTo>
-                  <a:lnTo>
-                    <a:pt x="4798709" y="284376"/>
-                  </a:lnTo>
-                  <a:lnTo>
-                    <a:pt x="4727086" y="232681"/>
-                  </a:lnTo>
-                  <a:lnTo>
-                    <a:pt x="4655464" y="176062"/>
-                  </a:lnTo>
-                  <a:lnTo>
-                    <a:pt x="4583841" y="114049"/>
-                  </a:lnTo>
-                  <a:lnTo>
-                    <a:pt x="4512219" y="46130"/>
+                    <a:pt x="7019007" y="792162"/>
+                  </a:lnTo>
+                  <a:lnTo>
+                    <a:pt x="6947385" y="789015"/>
+                  </a:lnTo>
+                  <a:lnTo>
+                    <a:pt x="6875762" y="785567"/>
+                  </a:lnTo>
+                  <a:lnTo>
+                    <a:pt x="6804139" y="781790"/>
+                  </a:lnTo>
+                  <a:lnTo>
+                    <a:pt x="6732517" y="777653"/>
+                  </a:lnTo>
+                  <a:lnTo>
+                    <a:pt x="6660894" y="773122"/>
+                  </a:lnTo>
+                  <a:lnTo>
+                    <a:pt x="6589272" y="768158"/>
+                  </a:lnTo>
+                  <a:lnTo>
+                    <a:pt x="6517649" y="762720"/>
+                  </a:lnTo>
+                  <a:lnTo>
+                    <a:pt x="6446027" y="756764"/>
+                  </a:lnTo>
+                  <a:lnTo>
+                    <a:pt x="6374404" y="750240"/>
+                  </a:lnTo>
+                  <a:lnTo>
+                    <a:pt x="6302782" y="743093"/>
+                  </a:lnTo>
+                  <a:lnTo>
+                    <a:pt x="6231159" y="735265"/>
+                  </a:lnTo>
+                  <a:lnTo>
+                    <a:pt x="6159537" y="726690"/>
+                  </a:lnTo>
+                  <a:lnTo>
+                    <a:pt x="6087914" y="717296"/>
+                  </a:lnTo>
+                  <a:lnTo>
+                    <a:pt x="6016292" y="707007"/>
+                  </a:lnTo>
+                  <a:lnTo>
+                    <a:pt x="5944669" y="695736"/>
+                  </a:lnTo>
+                  <a:lnTo>
+                    <a:pt x="5873047" y="683390"/>
+                  </a:lnTo>
+                  <a:lnTo>
+                    <a:pt x="5801424" y="669867"/>
+                  </a:lnTo>
+                  <a:lnTo>
+                    <a:pt x="5729802" y="655053"/>
+                  </a:lnTo>
+                  <a:lnTo>
+                    <a:pt x="5658179" y="638826"/>
+                  </a:lnTo>
+                  <a:lnTo>
+                    <a:pt x="5586557" y="621051"/>
+                  </a:lnTo>
+                  <a:lnTo>
+                    <a:pt x="5514934" y="601581"/>
+                  </a:lnTo>
+                  <a:lnTo>
+                    <a:pt x="5443311" y="580253"/>
+                  </a:lnTo>
+                  <a:lnTo>
+                    <a:pt x="5371689" y="556891"/>
+                  </a:lnTo>
+                  <a:lnTo>
+                    <a:pt x="5300066" y="531301"/>
+                  </a:lnTo>
+                  <a:lnTo>
+                    <a:pt x="5228444" y="503269"/>
+                  </a:lnTo>
+                  <a:lnTo>
+                    <a:pt x="5156821" y="472563"/>
+                  </a:lnTo>
+                  <a:lnTo>
+                    <a:pt x="5085199" y="438927"/>
+                  </a:lnTo>
+                  <a:lnTo>
+                    <a:pt x="5013576" y="402084"/>
+                  </a:lnTo>
+                  <a:lnTo>
+                    <a:pt x="4941954" y="361725"/>
+                  </a:lnTo>
+                  <a:lnTo>
+                    <a:pt x="4870331" y="317517"/>
+                  </a:lnTo>
+                  <a:lnTo>
+                    <a:pt x="4798709" y="269092"/>
+                  </a:lnTo>
+                  <a:lnTo>
+                    <a:pt x="4727086" y="216047"/>
+                  </a:lnTo>
+                  <a:lnTo>
+                    <a:pt x="4655464" y="157942"/>
+                  </a:lnTo>
+                  <a:lnTo>
+                    <a:pt x="4583841" y="94295"/>
+                  </a:lnTo>
+                  <a:lnTo>
+                    <a:pt x="4512219" y="24575"/>
                   </a:lnTo>
                   <a:lnTo>
                     <a:pt x="4440596" y="0"/>
                   </a:lnTo>
                   <a:lnTo>
-                    <a:pt x="4368974" y="7003"/>
-                  </a:lnTo>
-                  <a:lnTo>
-                    <a:pt x="4297351" y="13947"/>
-                  </a:lnTo>
-                  <a:lnTo>
-                    <a:pt x="4225729" y="20833"/>
-                  </a:lnTo>
-                  <a:lnTo>
-                    <a:pt x="4154106" y="27660"/>
-                  </a:lnTo>
-                  <a:lnTo>
-                    <a:pt x="4082483" y="34429"/>
-                  </a:lnTo>
-                  <a:lnTo>
-                    <a:pt x="4010861" y="41141"/>
-                  </a:lnTo>
-                  <a:lnTo>
-                    <a:pt x="3939238" y="47796"/>
-                  </a:lnTo>
-                  <a:lnTo>
-                    <a:pt x="3867616" y="54395"/>
-                  </a:lnTo>
-                  <a:lnTo>
-                    <a:pt x="3795993" y="60938"/>
-                  </a:lnTo>
-                  <a:lnTo>
-                    <a:pt x="3724371" y="67425"/>
-                  </a:lnTo>
-                  <a:lnTo>
-                    <a:pt x="3652748" y="73858"/>
-                  </a:lnTo>
-                  <a:lnTo>
-                    <a:pt x="3581126" y="80236"/>
-                  </a:lnTo>
-                  <a:lnTo>
-                    <a:pt x="3509503" y="86560"/>
-                  </a:lnTo>
-                  <a:lnTo>
-                    <a:pt x="3437881" y="92830"/>
-                  </a:lnTo>
-                  <a:lnTo>
-                    <a:pt x="3366258" y="99048"/>
-                  </a:lnTo>
-                  <a:lnTo>
-                    <a:pt x="3294636" y="105212"/>
-                  </a:lnTo>
-                  <a:lnTo>
-                    <a:pt x="3223013" y="111325"/>
-                  </a:lnTo>
-                  <a:lnTo>
-                    <a:pt x="3151391" y="117386"/>
-                  </a:lnTo>
-                  <a:lnTo>
-                    <a:pt x="3079768" y="123395"/>
-                  </a:lnTo>
-                  <a:lnTo>
-                    <a:pt x="3008146" y="129354"/>
-                  </a:lnTo>
-                  <a:lnTo>
-                    <a:pt x="2936523" y="135262"/>
-                  </a:lnTo>
-                  <a:lnTo>
-                    <a:pt x="2864901" y="141120"/>
-                  </a:lnTo>
-                  <a:lnTo>
-                    <a:pt x="2793278" y="146929"/>
-                  </a:lnTo>
-                  <a:lnTo>
-                    <a:pt x="2721655" y="152688"/>
-                  </a:lnTo>
-                  <a:lnTo>
-                    <a:pt x="2650033" y="158399"/>
-                  </a:lnTo>
-                  <a:lnTo>
-                    <a:pt x="2578410" y="164061"/>
-                  </a:lnTo>
-                  <a:lnTo>
-                    <a:pt x="2506788" y="169675"/>
-                  </a:lnTo>
-                  <a:lnTo>
-                    <a:pt x="2435165" y="175242"/>
-                  </a:lnTo>
-                  <a:lnTo>
-                    <a:pt x="2363543" y="180761"/>
-                  </a:lnTo>
-                  <a:lnTo>
-                    <a:pt x="2291920" y="186234"/>
-                  </a:lnTo>
-                  <a:lnTo>
-                    <a:pt x="2220298" y="191661"/>
-                  </a:lnTo>
-                  <a:lnTo>
-                    <a:pt x="2148675" y="197041"/>
-                  </a:lnTo>
-                  <a:lnTo>
-                    <a:pt x="2077053" y="202376"/>
-                  </a:lnTo>
-                  <a:lnTo>
-                    <a:pt x="2005430" y="207666"/>
-                  </a:lnTo>
-                  <a:lnTo>
-                    <a:pt x="1933808" y="212911"/>
-                  </a:lnTo>
-                  <a:lnTo>
-                    <a:pt x="1862185" y="218112"/>
-                  </a:lnTo>
-                  <a:lnTo>
-                    <a:pt x="1790563" y="223268"/>
-                  </a:lnTo>
-                  <a:lnTo>
-                    <a:pt x="1718940" y="228381"/>
-                  </a:lnTo>
-                  <a:lnTo>
-                    <a:pt x="1647318" y="233451"/>
-                  </a:lnTo>
-                  <a:lnTo>
-                    <a:pt x="1575695" y="238477"/>
-                  </a:lnTo>
-                  <a:lnTo>
-                    <a:pt x="1504073" y="243462"/>
-                  </a:lnTo>
-                  <a:lnTo>
-                    <a:pt x="1432450" y="248403"/>
-                  </a:lnTo>
-                  <a:lnTo>
-                    <a:pt x="1360827" y="253304"/>
-                  </a:lnTo>
-                  <a:lnTo>
-                    <a:pt x="1289205" y="258162"/>
-                  </a:lnTo>
-                  <a:lnTo>
-                    <a:pt x="1217582" y="262980"/>
-                  </a:lnTo>
-                  <a:lnTo>
-                    <a:pt x="1145960" y="267756"/>
-                  </a:lnTo>
-                  <a:lnTo>
-                    <a:pt x="1074337" y="272492"/>
-                  </a:lnTo>
-                  <a:lnTo>
-                    <a:pt x="1002715" y="277189"/>
-                  </a:lnTo>
-                  <a:lnTo>
-                    <a:pt x="931092" y="281845"/>
-                  </a:lnTo>
-                  <a:lnTo>
-                    <a:pt x="859470" y="286462"/>
-                  </a:lnTo>
-                  <a:lnTo>
-                    <a:pt x="787847" y="291040"/>
-                  </a:lnTo>
-                  <a:lnTo>
-                    <a:pt x="716225" y="295579"/>
-                  </a:lnTo>
-                  <a:lnTo>
-                    <a:pt x="644602" y="300079"/>
-                  </a:lnTo>
-                  <a:lnTo>
-                    <a:pt x="572980" y="304542"/>
-                  </a:lnTo>
-                  <a:lnTo>
-                    <a:pt x="501357" y="308966"/>
-                  </a:lnTo>
-                  <a:lnTo>
-                    <a:pt x="429735" y="313354"/>
-                  </a:lnTo>
-                  <a:lnTo>
-                    <a:pt x="358112" y="317704"/>
-                  </a:lnTo>
-                  <a:lnTo>
-                    <a:pt x="286490" y="322017"/>
-                  </a:lnTo>
-                  <a:lnTo>
-                    <a:pt x="214867" y="326294"/>
-                  </a:lnTo>
-                  <a:lnTo>
-                    <a:pt x="143245" y="330534"/>
-                  </a:lnTo>
-                  <a:lnTo>
-                    <a:pt x="71622" y="334739"/>
-                  </a:lnTo>
-                  <a:lnTo>
-                    <a:pt x="0" y="338908"/>
+                    <a:pt x="4368974" y="6996"/>
+                  </a:lnTo>
+                  <a:lnTo>
+                    <a:pt x="4297351" y="13934"/>
+                  </a:lnTo>
+                  <a:lnTo>
+                    <a:pt x="4225729" y="20813"/>
+                  </a:lnTo>
+                  <a:lnTo>
+                    <a:pt x="4154106" y="27633"/>
+                  </a:lnTo>
+                  <a:lnTo>
+                    <a:pt x="4082483" y="34396"/>
+                  </a:lnTo>
+                  <a:lnTo>
+                    <a:pt x="4010861" y="41101"/>
+                  </a:lnTo>
+                  <a:lnTo>
+                    <a:pt x="3939238" y="47749"/>
+                  </a:lnTo>
+                  <a:lnTo>
+                    <a:pt x="3867616" y="54341"/>
+                  </a:lnTo>
+                  <a:lnTo>
+                    <a:pt x="3795993" y="60877"/>
+                  </a:lnTo>
+                  <a:lnTo>
+                    <a:pt x="3724371" y="67358"/>
+                  </a:lnTo>
+                  <a:lnTo>
+                    <a:pt x="3652748" y="73783"/>
+                  </a:lnTo>
+                  <a:lnTo>
+                    <a:pt x="3581126" y="80155"/>
+                  </a:lnTo>
+                  <a:lnTo>
+                    <a:pt x="3509503" y="86472"/>
+                  </a:lnTo>
+                  <a:lnTo>
+                    <a:pt x="3437881" y="92735"/>
+                  </a:lnTo>
+                  <a:lnTo>
+                    <a:pt x="3366258" y="98946"/>
+                  </a:lnTo>
+                  <a:lnTo>
+                    <a:pt x="3294636" y="105104"/>
+                  </a:lnTo>
+                  <a:lnTo>
+                    <a:pt x="3223013" y="111209"/>
+                  </a:lnTo>
+                  <a:lnTo>
+                    <a:pt x="3151391" y="117263"/>
+                  </a:lnTo>
+                  <a:lnTo>
+                    <a:pt x="3079768" y="123266"/>
+                  </a:lnTo>
+                  <a:lnTo>
+                    <a:pt x="3008146" y="129217"/>
+                  </a:lnTo>
+                  <a:lnTo>
+                    <a:pt x="2936523" y="135119"/>
+                  </a:lnTo>
+                  <a:lnTo>
+                    <a:pt x="2864901" y="140970"/>
+                  </a:lnTo>
+                  <a:lnTo>
+                    <a:pt x="2793278" y="146771"/>
+                  </a:lnTo>
+                  <a:lnTo>
+                    <a:pt x="2721655" y="152524"/>
+                  </a:lnTo>
+                  <a:lnTo>
+                    <a:pt x="2650033" y="158227"/>
+                  </a:lnTo>
+                  <a:lnTo>
+                    <a:pt x="2578410" y="163882"/>
+                  </a:lnTo>
+                  <a:lnTo>
+                    <a:pt x="2506788" y="169490"/>
+                  </a:lnTo>
+                  <a:lnTo>
+                    <a:pt x="2435165" y="175049"/>
+                  </a:lnTo>
+                  <a:lnTo>
+                    <a:pt x="2363543" y="180562"/>
+                  </a:lnTo>
+                  <a:lnTo>
+                    <a:pt x="2291920" y="186028"/>
+                  </a:lnTo>
+                  <a:lnTo>
+                    <a:pt x="2220298" y="191447"/>
+                  </a:lnTo>
+                  <a:lnTo>
+                    <a:pt x="2148675" y="196821"/>
+                  </a:lnTo>
+                  <a:lnTo>
+                    <a:pt x="2077053" y="202148"/>
+                  </a:lnTo>
+                  <a:lnTo>
+                    <a:pt x="2005430" y="207431"/>
+                  </a:lnTo>
+                  <a:lnTo>
+                    <a:pt x="1933808" y="212669"/>
+                  </a:lnTo>
+                  <a:lnTo>
+                    <a:pt x="1862185" y="217863"/>
+                  </a:lnTo>
+                  <a:lnTo>
+                    <a:pt x="1790563" y="223012"/>
+                  </a:lnTo>
+                  <a:lnTo>
+                    <a:pt x="1718940" y="228118"/>
+                  </a:lnTo>
+                  <a:lnTo>
+                    <a:pt x="1647318" y="233181"/>
+                  </a:lnTo>
+                  <a:lnTo>
+                    <a:pt x="1575695" y="238200"/>
+                  </a:lnTo>
+                  <a:lnTo>
+                    <a:pt x="1504073" y="243177"/>
+                  </a:lnTo>
+                  <a:lnTo>
+                    <a:pt x="1432450" y="248112"/>
+                  </a:lnTo>
+                  <a:lnTo>
+                    <a:pt x="1360827" y="253005"/>
+                  </a:lnTo>
+                  <a:lnTo>
+                    <a:pt x="1289205" y="257857"/>
+                  </a:lnTo>
+                  <a:lnTo>
+                    <a:pt x="1217582" y="262667"/>
+                  </a:lnTo>
+                  <a:lnTo>
+                    <a:pt x="1145960" y="267437"/>
+                  </a:lnTo>
+                  <a:lnTo>
+                    <a:pt x="1074337" y="272166"/>
+                  </a:lnTo>
+                  <a:lnTo>
+                    <a:pt x="1002715" y="276855"/>
+                  </a:lnTo>
+                  <a:lnTo>
+                    <a:pt x="931092" y="281504"/>
+                  </a:lnTo>
+                  <a:lnTo>
+                    <a:pt x="859470" y="286114"/>
+                  </a:lnTo>
+                  <a:lnTo>
+                    <a:pt x="787847" y="290685"/>
+                  </a:lnTo>
+                  <a:lnTo>
+                    <a:pt x="716225" y="295217"/>
+                  </a:lnTo>
+                  <a:lnTo>
+                    <a:pt x="644602" y="299710"/>
+                  </a:lnTo>
+                  <a:lnTo>
+                    <a:pt x="572980" y="304166"/>
+                  </a:lnTo>
+                  <a:lnTo>
+                    <a:pt x="501357" y="308584"/>
+                  </a:lnTo>
+                  <a:lnTo>
+                    <a:pt x="429735" y="312964"/>
+                  </a:lnTo>
+                  <a:lnTo>
+                    <a:pt x="358112" y="317307"/>
+                  </a:lnTo>
+                  <a:lnTo>
+                    <a:pt x="286490" y="321613"/>
+                  </a:lnTo>
+                  <a:lnTo>
+                    <a:pt x="214867" y="325883"/>
+                  </a:lnTo>
+                  <a:lnTo>
+                    <a:pt x="143245" y="330117"/>
+                  </a:lnTo>
+                  <a:lnTo>
+                    <a:pt x="71622" y="334314"/>
+                  </a:lnTo>
+                  <a:lnTo>
+                    <a:pt x="0" y="338476"/>
                   </a:lnTo>
                 </a:path>
               </a:pathLst>
@@ -3924,231 +3924,231 @@
           </p:nvSpPr>
           <p:spPr>
             <a:xfrm>
-              <a:off x="3144925" y="2073503"/>
-              <a:ext cx="5117754" cy="3300876"/>
+              <a:off x="3167785" y="2073503"/>
+              <a:ext cx="5094894" cy="3299189"/>
             </a:xfrm>
             <a:custGeom>
               <a:avLst/>
               <a:pathLst>
-                <a:path w="5117754" h="3300876">
+                <a:path w="5094894" h="3299189">
                   <a:moveTo>
                     <a:pt x="0" y="0"/>
                   </a:moveTo>
                   <a:lnTo>
-                    <a:pt x="32554" y="65418"/>
-                  </a:lnTo>
-                  <a:lnTo>
-                    <a:pt x="104177" y="203526"/>
-                  </a:lnTo>
-                  <a:lnTo>
-                    <a:pt x="175800" y="336055"/>
-                  </a:lnTo>
-                  <a:lnTo>
-                    <a:pt x="247422" y="463229"/>
-                  </a:lnTo>
-                  <a:lnTo>
-                    <a:pt x="319045" y="585265"/>
-                  </a:lnTo>
-                  <a:lnTo>
-                    <a:pt x="390667" y="702371"/>
-                  </a:lnTo>
-                  <a:lnTo>
-                    <a:pt x="462290" y="814745"/>
-                  </a:lnTo>
-                  <a:lnTo>
-                    <a:pt x="533912" y="922579"/>
-                  </a:lnTo>
-                  <a:lnTo>
-                    <a:pt x="605535" y="1026056"/>
-                  </a:lnTo>
-                  <a:lnTo>
-                    <a:pt x="677157" y="1125353"/>
-                  </a:lnTo>
-                  <a:lnTo>
-                    <a:pt x="748780" y="1220637"/>
-                  </a:lnTo>
-                  <a:lnTo>
-                    <a:pt x="820402" y="1312072"/>
-                  </a:lnTo>
-                  <a:lnTo>
-                    <a:pt x="892025" y="1399813"/>
-                  </a:lnTo>
-                  <a:lnTo>
-                    <a:pt x="963647" y="1484009"/>
-                  </a:lnTo>
-                  <a:lnTo>
-                    <a:pt x="1035270" y="1564803"/>
-                  </a:lnTo>
-                  <a:lnTo>
-                    <a:pt x="1106892" y="1642333"/>
-                  </a:lnTo>
-                  <a:lnTo>
-                    <a:pt x="1178515" y="1716730"/>
-                  </a:lnTo>
-                  <a:lnTo>
-                    <a:pt x="1250137" y="1788122"/>
-                  </a:lnTo>
-                  <a:lnTo>
-                    <a:pt x="1321760" y="1856629"/>
-                  </a:lnTo>
-                  <a:lnTo>
-                    <a:pt x="1393382" y="1922369"/>
-                  </a:lnTo>
-                  <a:lnTo>
-                    <a:pt x="1465005" y="1985452"/>
-                  </a:lnTo>
-                  <a:lnTo>
-                    <a:pt x="1536628" y="2045987"/>
-                  </a:lnTo>
-                  <a:lnTo>
-                    <a:pt x="1608250" y="2104076"/>
-                  </a:lnTo>
-                  <a:lnTo>
-                    <a:pt x="1679873" y="2159818"/>
-                  </a:lnTo>
-                  <a:lnTo>
-                    <a:pt x="1751495" y="2213307"/>
-                  </a:lnTo>
-                  <a:lnTo>
-                    <a:pt x="1823118" y="2264636"/>
-                  </a:lnTo>
-                  <a:lnTo>
-                    <a:pt x="1894740" y="2313891"/>
-                  </a:lnTo>
-                  <a:lnTo>
-                    <a:pt x="1966363" y="2361156"/>
-                  </a:lnTo>
-                  <a:lnTo>
-                    <a:pt x="2037985" y="2406511"/>
-                  </a:lnTo>
-                  <a:lnTo>
-                    <a:pt x="2109608" y="2450034"/>
-                  </a:lnTo>
-                  <a:lnTo>
-                    <a:pt x="2181230" y="2491799"/>
-                  </a:lnTo>
-                  <a:lnTo>
-                    <a:pt x="2252853" y="2531876"/>
-                  </a:lnTo>
-                  <a:lnTo>
-                    <a:pt x="2324475" y="2570334"/>
-                  </a:lnTo>
-                  <a:lnTo>
-                    <a:pt x="2396098" y="2607238"/>
-                  </a:lnTo>
-                  <a:lnTo>
-                    <a:pt x="2467720" y="2642651"/>
-                  </a:lnTo>
-                  <a:lnTo>
-                    <a:pt x="2539343" y="2676633"/>
-                  </a:lnTo>
-                  <a:lnTo>
-                    <a:pt x="2610965" y="2709242"/>
-                  </a:lnTo>
-                  <a:lnTo>
-                    <a:pt x="2682588" y="2740534"/>
-                  </a:lnTo>
-                  <a:lnTo>
-                    <a:pt x="2754210" y="2770562"/>
-                  </a:lnTo>
-                  <a:lnTo>
-                    <a:pt x="2825833" y="2799376"/>
-                  </a:lnTo>
-                  <a:lnTo>
-                    <a:pt x="2897456" y="2827026"/>
-                  </a:lnTo>
-                  <a:lnTo>
-                    <a:pt x="2969078" y="2853559"/>
-                  </a:lnTo>
-                  <a:lnTo>
-                    <a:pt x="3040701" y="2879020"/>
-                  </a:lnTo>
-                  <a:lnTo>
-                    <a:pt x="3112323" y="2903453"/>
-                  </a:lnTo>
-                  <a:lnTo>
-                    <a:pt x="3183946" y="2926898"/>
-                  </a:lnTo>
-                  <a:lnTo>
-                    <a:pt x="3255568" y="2949396"/>
-                  </a:lnTo>
-                  <a:lnTo>
-                    <a:pt x="3327191" y="2970985"/>
-                  </a:lnTo>
-                  <a:lnTo>
-                    <a:pt x="3398813" y="2991702"/>
-                  </a:lnTo>
-                  <a:lnTo>
-                    <a:pt x="3470436" y="3011581"/>
-                  </a:lnTo>
-                  <a:lnTo>
-                    <a:pt x="3542058" y="3030658"/>
-                  </a:lnTo>
-                  <a:lnTo>
-                    <a:pt x="3613681" y="3048964"/>
-                  </a:lnTo>
-                  <a:lnTo>
-                    <a:pt x="3685303" y="3066530"/>
-                  </a:lnTo>
-                  <a:lnTo>
-                    <a:pt x="3756926" y="3083387"/>
-                  </a:lnTo>
-                  <a:lnTo>
-                    <a:pt x="3828548" y="3099562"/>
-                  </a:lnTo>
-                  <a:lnTo>
-                    <a:pt x="3900171" y="3115084"/>
-                  </a:lnTo>
-                  <a:lnTo>
-                    <a:pt x="3971793" y="3129979"/>
-                  </a:lnTo>
-                  <a:lnTo>
-                    <a:pt x="4043416" y="3144272"/>
-                  </a:lnTo>
-                  <a:lnTo>
-                    <a:pt x="4115038" y="3157988"/>
-                  </a:lnTo>
-                  <a:lnTo>
-                    <a:pt x="4186661" y="3171149"/>
-                  </a:lnTo>
-                  <a:lnTo>
-                    <a:pt x="4258284" y="3183779"/>
-                  </a:lnTo>
-                  <a:lnTo>
-                    <a:pt x="4329906" y="3195898"/>
-                  </a:lnTo>
-                  <a:lnTo>
-                    <a:pt x="4401529" y="3207528"/>
-                  </a:lnTo>
-                  <a:lnTo>
-                    <a:pt x="4473151" y="3218688"/>
-                  </a:lnTo>
-                  <a:lnTo>
-                    <a:pt x="4544774" y="3229397"/>
-                  </a:lnTo>
-                  <a:lnTo>
-                    <a:pt x="4616396" y="3239673"/>
-                  </a:lnTo>
-                  <a:lnTo>
-                    <a:pt x="4688019" y="3249534"/>
-                  </a:lnTo>
-                  <a:lnTo>
-                    <a:pt x="4759641" y="3258997"/>
-                  </a:lnTo>
-                  <a:lnTo>
-                    <a:pt x="4831264" y="3268077"/>
-                  </a:lnTo>
-                  <a:lnTo>
-                    <a:pt x="4902886" y="3276791"/>
-                  </a:lnTo>
-                  <a:lnTo>
-                    <a:pt x="4974509" y="3285152"/>
-                  </a:lnTo>
-                  <a:lnTo>
-                    <a:pt x="5046131" y="3293176"/>
-                  </a:lnTo>
-                  <a:lnTo>
-                    <a:pt x="5117754" y="3300876"/>
+                    <a:pt x="9694" y="19769"/>
+                  </a:lnTo>
+                  <a:lnTo>
+                    <a:pt x="81317" y="159913"/>
+                  </a:lnTo>
+                  <a:lnTo>
+                    <a:pt x="152939" y="294387"/>
+                  </a:lnTo>
+                  <a:lnTo>
+                    <a:pt x="224562" y="423421"/>
+                  </a:lnTo>
+                  <a:lnTo>
+                    <a:pt x="296184" y="547235"/>
+                  </a:lnTo>
+                  <a:lnTo>
+                    <a:pt x="367807" y="666039"/>
+                  </a:lnTo>
+                  <a:lnTo>
+                    <a:pt x="439429" y="780037"/>
+                  </a:lnTo>
+                  <a:lnTo>
+                    <a:pt x="511052" y="889422"/>
+                  </a:lnTo>
+                  <a:lnTo>
+                    <a:pt x="582674" y="994382"/>
+                  </a:lnTo>
+                  <a:lnTo>
+                    <a:pt x="654297" y="1095096"/>
+                  </a:lnTo>
+                  <a:lnTo>
+                    <a:pt x="725919" y="1191735"/>
+                  </a:lnTo>
+                  <a:lnTo>
+                    <a:pt x="797542" y="1284464"/>
+                  </a:lnTo>
+                  <a:lnTo>
+                    <a:pt x="869164" y="1373442"/>
+                  </a:lnTo>
+                  <a:lnTo>
+                    <a:pt x="940787" y="1458820"/>
+                  </a:lnTo>
+                  <a:lnTo>
+                    <a:pt x="1012410" y="1540744"/>
+                  </a:lnTo>
+                  <a:lnTo>
+                    <a:pt x="1084032" y="1619353"/>
+                  </a:lnTo>
+                  <a:lnTo>
+                    <a:pt x="1155655" y="1694782"/>
+                  </a:lnTo>
+                  <a:lnTo>
+                    <a:pt x="1227277" y="1767159"/>
+                  </a:lnTo>
+                  <a:lnTo>
+                    <a:pt x="1298900" y="1836608"/>
+                  </a:lnTo>
+                  <a:lnTo>
+                    <a:pt x="1370522" y="1903247"/>
+                  </a:lnTo>
+                  <a:lnTo>
+                    <a:pt x="1442145" y="1967190"/>
+                  </a:lnTo>
+                  <a:lnTo>
+                    <a:pt x="1513767" y="2028547"/>
+                  </a:lnTo>
+                  <a:lnTo>
+                    <a:pt x="1585390" y="2087420"/>
+                  </a:lnTo>
+                  <a:lnTo>
+                    <a:pt x="1657012" y="2143912"/>
+                  </a:lnTo>
+                  <a:lnTo>
+                    <a:pt x="1728635" y="2198119"/>
+                  </a:lnTo>
+                  <a:lnTo>
+                    <a:pt x="1800257" y="2250132"/>
+                  </a:lnTo>
+                  <a:lnTo>
+                    <a:pt x="1871880" y="2300041"/>
+                  </a:lnTo>
+                  <a:lnTo>
+                    <a:pt x="1943502" y="2347931"/>
+                  </a:lnTo>
+                  <a:lnTo>
+                    <a:pt x="2015125" y="2393884"/>
+                  </a:lnTo>
+                  <a:lnTo>
+                    <a:pt x="2086747" y="2437977"/>
+                  </a:lnTo>
+                  <a:lnTo>
+                    <a:pt x="2158370" y="2480286"/>
+                  </a:lnTo>
+                  <a:lnTo>
+                    <a:pt x="2229992" y="2520884"/>
+                  </a:lnTo>
+                  <a:lnTo>
+                    <a:pt x="2301615" y="2559839"/>
+                  </a:lnTo>
+                  <a:lnTo>
+                    <a:pt x="2373238" y="2597218"/>
+                  </a:lnTo>
+                  <a:lnTo>
+                    <a:pt x="2444860" y="2633085"/>
+                  </a:lnTo>
+                  <a:lnTo>
+                    <a:pt x="2516483" y="2667500"/>
+                  </a:lnTo>
+                  <a:lnTo>
+                    <a:pt x="2588105" y="2700524"/>
+                  </a:lnTo>
+                  <a:lnTo>
+                    <a:pt x="2659728" y="2732211"/>
+                  </a:lnTo>
+                  <a:lnTo>
+                    <a:pt x="2731350" y="2762616"/>
+                  </a:lnTo>
+                  <a:lnTo>
+                    <a:pt x="2802973" y="2791792"/>
+                  </a:lnTo>
+                  <a:lnTo>
+                    <a:pt x="2874595" y="2819786"/>
+                  </a:lnTo>
+                  <a:lnTo>
+                    <a:pt x="2946218" y="2846649"/>
+                  </a:lnTo>
+                  <a:lnTo>
+                    <a:pt x="3017840" y="2872424"/>
+                  </a:lnTo>
+                  <a:lnTo>
+                    <a:pt x="3089463" y="2897157"/>
+                  </a:lnTo>
+                  <a:lnTo>
+                    <a:pt x="3161085" y="2920889"/>
+                  </a:lnTo>
+                  <a:lnTo>
+                    <a:pt x="3232708" y="2943661"/>
+                  </a:lnTo>
+                  <a:lnTo>
+                    <a:pt x="3304330" y="2965511"/>
+                  </a:lnTo>
+                  <a:lnTo>
+                    <a:pt x="3375953" y="2986478"/>
+                  </a:lnTo>
+                  <a:lnTo>
+                    <a:pt x="3447575" y="3006596"/>
+                  </a:lnTo>
+                  <a:lnTo>
+                    <a:pt x="3519198" y="3025900"/>
+                  </a:lnTo>
+                  <a:lnTo>
+                    <a:pt x="3590820" y="3044424"/>
+                  </a:lnTo>
+                  <a:lnTo>
+                    <a:pt x="3662443" y="3062198"/>
+                  </a:lnTo>
+                  <a:lnTo>
+                    <a:pt x="3734066" y="3079253"/>
+                  </a:lnTo>
+                  <a:lnTo>
+                    <a:pt x="3805688" y="3095617"/>
+                  </a:lnTo>
+                  <a:lnTo>
+                    <a:pt x="3877311" y="3111320"/>
+                  </a:lnTo>
+                  <a:lnTo>
+                    <a:pt x="3948933" y="3126388"/>
+                  </a:lnTo>
+                  <a:lnTo>
+                    <a:pt x="4020556" y="3140846"/>
+                  </a:lnTo>
+                  <a:lnTo>
+                    <a:pt x="4092178" y="3154718"/>
+                  </a:lnTo>
+                  <a:lnTo>
+                    <a:pt x="4163801" y="3168030"/>
+                  </a:lnTo>
+                  <a:lnTo>
+                    <a:pt x="4235423" y="3180803"/>
+                  </a:lnTo>
+                  <a:lnTo>
+                    <a:pt x="4307046" y="3193060"/>
+                  </a:lnTo>
+                  <a:lnTo>
+                    <a:pt x="4378668" y="3204820"/>
+                  </a:lnTo>
+                  <a:lnTo>
+                    <a:pt x="4450291" y="3216105"/>
+                  </a:lnTo>
+                  <a:lnTo>
+                    <a:pt x="4521913" y="3226933"/>
+                  </a:lnTo>
+                  <a:lnTo>
+                    <a:pt x="4593536" y="3237323"/>
+                  </a:lnTo>
+                  <a:lnTo>
+                    <a:pt x="4665158" y="3247293"/>
+                  </a:lnTo>
+                  <a:lnTo>
+                    <a:pt x="4736781" y="3256859"/>
+                  </a:lnTo>
+                  <a:lnTo>
+                    <a:pt x="4808403" y="3266038"/>
+                  </a:lnTo>
+                  <a:lnTo>
+                    <a:pt x="4880026" y="3274846"/>
+                  </a:lnTo>
+                  <a:lnTo>
+                    <a:pt x="4951648" y="3283298"/>
+                  </a:lnTo>
+                  <a:lnTo>
+                    <a:pt x="5023271" y="3291408"/>
+                  </a:lnTo>
+                  <a:lnTo>
+                    <a:pt x="5094894" y="3299189"/>
                   </a:lnTo>
                 </a:path>
               </a:pathLst>
@@ -4220,7 +4220,7 @@
           </p:nvSpPr>
           <p:spPr>
             <a:xfrm>
-              <a:off x="5636831" y="2073503"/>
+              <a:off x="5656410" y="2073503"/>
               <a:ext cx="0" cy="3649639"/>
             </a:xfrm>
             <a:custGeom>
@@ -4263,7 +4263,7 @@
           </p:nvSpPr>
           <p:spPr>
             <a:xfrm>
-              <a:off x="4328179" y="2073503"/>
+              <a:off x="4335733" y="2073503"/>
               <a:ext cx="0" cy="3649639"/>
             </a:xfrm>
             <a:custGeom>
@@ -4306,7 +4306,7 @@
           </p:nvSpPr>
           <p:spPr>
             <a:xfrm>
-              <a:off x="6683624" y="2073503"/>
+              <a:off x="6684598" y="2073503"/>
               <a:ext cx="0" cy="3649639"/>
             </a:xfrm>
             <a:custGeom>
@@ -4579,7 +4579,7 @@
           </p:nvSpPr>
           <p:spPr>
             <a:xfrm>
-              <a:off x="2970385" y="5785772"/>
+              <a:off x="2971977" y="5785772"/>
               <a:ext cx="161574" cy="80101"/>
             </a:xfrm>
             <a:prstGeom prst="rect">
@@ -4625,7 +4625,7 @@
           </p:nvSpPr>
           <p:spPr>
             <a:xfrm>
-              <a:off x="5501440" y="5785772"/>
+              <a:off x="5499574" y="5785772"/>
               <a:ext cx="62179" cy="80101"/>
             </a:xfrm>
             <a:prstGeom prst="rect">
@@ -4671,7 +4671,7 @@
           </p:nvSpPr>
           <p:spPr>
             <a:xfrm>
-              <a:off x="7951708" y="5785772"/>
+              <a:off x="7946384" y="5785772"/>
               <a:ext cx="124358" cy="80101"/>
             </a:xfrm>
             <a:prstGeom prst="rect">
@@ -4842,7 +4842,7 @@
                   <a:latin typeface="Helvetica"/>
                   <a:cs typeface="Helvetica"/>
                 </a:rPr>
-                <a:t>subHR per 10 mL/min decline: 1.77 (0.89-3.53), p_Bonf = 0.625 (n = 6)  |  per IQR decline (Δ = 23.7): 3.88 (0.76-19.93)  |  IQR: [-12.1, 11.6]</a:t>
+                <a:t>subHR per 10 mL/min decline: 1.77 (0.89-3.53), p_Bonf = 0.625 (n = 6)  |  per IQR decline (Δ = 23.7): 3.87 (0.76-19.85)  |  IQR: [-12.1, 11.6]</a:t>
               </a:r>
             </a:p>
           </p:txBody>
